--- a/docs/law-cli-design-en.pptx
+++ b/docs/law-cli-design-en.pptx
@@ -5925,7 +5925,7 @@
                 </a:solidFill>
                 <a:latin typeface="Apple SD Gothic Neo"/>
               </a:rPr>
-              <a:t>• 4) English edition of this design deck → committed to GitHub (Korean edition stays gitignored)</a:t>
+              <a:t>• 4) [done] English edition of this design deck → committed to GitHub (Korean edition stays gitignored)</a:t>
             </a:r>
           </a:p>
           <a:p>
@@ -5941,7 +5941,23 @@
                 </a:solidFill>
                 <a:latin typeface="Apple SD Gothic Neo"/>
               </a:rPr>
-              <a:t>• 5) (Under review) statute scope presets; whether to add a case-law corpus</a:t>
+              <a:t>• 5) [done] Statute scope presets (--preset: family, labor, housing, traffic) — normalized exact match</a:t>
+            </a:r>
+          </a:p>
+          <a:p>
+            <a:pPr lvl="1">
+              <a:spcAft>
+                <a:spcPts val="800"/>
+              </a:spcAft>
+            </a:pPr>
+            <a:r>
+              <a:rPr sz="1500" b="0">
+                <a:solidFill>
+                  <a:srgbClr val="595959"/>
+                </a:solidFill>
+                <a:latin typeface="Apple SD Gothic Neo"/>
+              </a:rPr>
+              <a:t>– Case-law corpus expansion deferred — outside the primary-source archive; needs a separate data source and license review</a:t>
             </a:r>
           </a:p>
         </p:txBody>
